--- a/ppt/Student_Performance_Prediction_Agent.pptx
+++ b/ppt/Student_Performance_Prediction_Agent.pptx
@@ -8890,8 +8890,8 @@
         </p:blipFill>
         <p:spPr>
           <a:xfrm>
-            <a:off x="320040" y="3200400"/>
-            <a:ext cx="8229600" cy="1463040"/>
+            <a:off x="228600" y="3063240"/>
+            <a:ext cx="8503920" cy="1920240"/>
           </a:xfrm>
           <a:prstGeom prst="rect">
             <a:avLst/>
